--- a/system-design-101/vi/lessons/sd-02-015/slides/sd-02-015.pptx
+++ b/system-design-101/vi/lessons/sd-02-015/slides/sd-02-015.pptx
@@ -11702,7 +11702,7 @@
               <a:buChar char="•"/>
             </a:pPr>
             <a:r>
-              <a:rPr lang="en-US" sz="2850" dirty="0" spc="-4" kern="0">
+              <a:rPr lang="en-US" sz="2850" dirty="0" spc="1" kern="0">
                 <a:solidFill>
                   <a:srgbClr val="14161C"/>
                 </a:solidFill>
@@ -11710,10 +11710,10 @@
                 <a:ea typeface="Be Vietnam Pro" pitchFamily="34" charset="-122"/>
                 <a:cs typeface="Be Vietnam Pro" pitchFamily="34" charset="-120"/>
               </a:rPr>
-              <a:t>Có</a:t>
-            </a:r>
-            <a:r>
-              <a:rPr lang="en-US" sz="2850" dirty="0" spc="2" kern="0">
+              <a:t>Giao</a:t>
+            </a:r>
+            <a:r>
+              <a:rPr lang="en-US" sz="2850" dirty="0" spc="0" kern="0">
                 <a:solidFill>
                   <a:srgbClr val="14161C"/>
                 </a:solidFill>
@@ -11721,10 +11721,10 @@
                 <a:ea typeface="Be Vietnam Pro" pitchFamily="34" charset="-122"/>
                 <a:cs typeface="Be Vietnam Pro" pitchFamily="34" charset="-120"/>
               </a:rPr>
-              <a:t> giao</a:t>
-            </a:r>
-            <a:r>
-              <a:rPr lang="en-US" sz="2850" dirty="0" spc="0" kern="0">
+              <a:t> dịch:</a:t>
+            </a:r>
+            <a:r>
+              <a:rPr lang="en-US" sz="2850" dirty="0" spc="1" kern="0">
                 <a:solidFill>
                   <a:srgbClr val="14161C"/>
                 </a:solidFill>
@@ -11732,10 +11732,10 @@
                 <a:ea typeface="Be Vietnam Pro" pitchFamily="34" charset="-122"/>
                 <a:cs typeface="Be Vietnam Pro" pitchFamily="34" charset="-120"/>
               </a:rPr>
-              <a:t> dịch</a:t>
-            </a:r>
-            <a:r>
-              <a:rPr lang="en-US" sz="2850" dirty="0" spc="-9" kern="0">
+              <a:t> ghi</a:t>
+            </a:r>
+            <a:r>
+              <a:rPr lang="en-US" sz="2850" dirty="0" spc="-24" kern="0">
                 <a:solidFill>
                   <a:srgbClr val="14161C"/>
                 </a:solidFill>
@@ -11743,7 +11743,62 @@
                 <a:ea typeface="Be Vietnam Pro" pitchFamily="34" charset="-122"/>
                 <a:cs typeface="Be Vietnam Pro" pitchFamily="34" charset="-120"/>
               </a:rPr>
-              <a:t> (transaction).</a:t>
+              <a:t> trọn</a:t>
+            </a:r>
+            <a:r>
+              <a:rPr lang="en-US" sz="2850" dirty="0" spc="-10" kern="0">
+                <a:solidFill>
+                  <a:srgbClr val="14161C"/>
+                </a:solidFill>
+                <a:latin typeface="Be Vietnam Pro" pitchFamily="34" charset="0"/>
+                <a:ea typeface="Be Vietnam Pro" pitchFamily="34" charset="-122"/>
+                <a:cs typeface="Be Vietnam Pro" pitchFamily="34" charset="-120"/>
+              </a:rPr>
+              <a:t> vẹn,</a:t>
+            </a:r>
+            <a:r>
+              <a:rPr lang="en-US" sz="2850" dirty="0" spc="-2" kern="0">
+                <a:solidFill>
+                  <a:srgbClr val="14161C"/>
+                </a:solidFill>
+                <a:latin typeface="Be Vietnam Pro" pitchFamily="34" charset="0"/>
+                <a:ea typeface="Be Vietnam Pro" pitchFamily="34" charset="-122"/>
+                <a:cs typeface="Be Vietnam Pro" pitchFamily="34" charset="-120"/>
+              </a:rPr>
+              <a:t> hoặc</a:t>
+            </a:r>
+            <a:r>
+              <a:rPr lang="en-US" sz="2850" dirty="0" spc="-3" kern="0">
+                <a:solidFill>
+                  <a:srgbClr val="14161C"/>
+                </a:solidFill>
+                <a:latin typeface="Be Vietnam Pro" pitchFamily="34" charset="0"/>
+                <a:ea typeface="Be Vietnam Pro" pitchFamily="34" charset="-122"/>
+                <a:cs typeface="Be Vietnam Pro" pitchFamily="34" charset="-120"/>
+              </a:rPr>
+              <a:t> không</a:t>
+            </a:r>
+            <a:r>
+              <a:rPr lang="en-US" sz="2850" dirty="0" spc="-29" kern="0">
+                <a:solidFill>
+                  <a:srgbClr val="14161C"/>
+                </a:solidFill>
+                <a:latin typeface="Be Vietnam Pro" pitchFamily="34" charset="0"/>
+                <a:ea typeface="Be Vietnam Pro" pitchFamily="34" charset="-122"/>
+                <a:cs typeface="Be Vietnam Pro" pitchFamily="34" charset="-120"/>
+              </a:rPr>
+              <a:t> xảy</a:t>
+            </a:r>
+            <a:r>
+              <a:rPr lang="en-US" sz="2850" dirty="0" spc="-24" kern="0">
+                <a:solidFill>
+                  <a:srgbClr val="14161C"/>
+                </a:solidFill>
+                <a:latin typeface="Be Vietnam Pro" pitchFamily="34" charset="0"/>
+                <a:ea typeface="Be Vietnam Pro" pitchFamily="34" charset="-122"/>
+                <a:cs typeface="Be Vietnam Pro" pitchFamily="34" charset="-120"/>
+              </a:rPr>
+              <a:t> ra.</a:t>
             </a:r>
             <a:endParaRPr lang="en-US" sz="2850" dirty="0"/>
           </a:p>
@@ -11757,6 +11812,61 @@
               <a:buChar char="•"/>
             </a:pPr>
             <a:r>
+              <a:rPr lang="en-US" sz="2850" dirty="0" spc="-4" kern="0">
+                <a:solidFill>
+                  <a:srgbClr val="14161C"/>
+                </a:solidFill>
+                <a:latin typeface="Be Vietnam Pro" pitchFamily="34" charset="0"/>
+                <a:ea typeface="Be Vietnam Pro" pitchFamily="34" charset="-122"/>
+                <a:cs typeface="Be Vietnam Pro" pitchFamily="34" charset="-120"/>
+              </a:rPr>
+              <a:t>Chống</a:t>
+            </a:r>
+            <a:r>
+              <a:rPr lang="en-US" sz="2850" dirty="0" spc="1" kern="0">
+                <a:solidFill>
+                  <a:srgbClr val="14161C"/>
+                </a:solidFill>
+                <a:latin typeface="Be Vietnam Pro" pitchFamily="34" charset="0"/>
+                <a:ea typeface="Be Vietnam Pro" pitchFamily="34" charset="-122"/>
+                <a:cs typeface="Be Vietnam Pro" pitchFamily="34" charset="-120"/>
+              </a:rPr>
+              <a:t> ghi</a:t>
+            </a:r>
+            <a:r>
+              <a:rPr lang="en-US" sz="2850" dirty="0" spc="12" kern="0">
+                <a:solidFill>
+                  <a:srgbClr val="14161C"/>
+                </a:solidFill>
+                <a:latin typeface="Be Vietnam Pro" pitchFamily="34" charset="0"/>
+                <a:ea typeface="Be Vietnam Pro" pitchFamily="34" charset="-122"/>
+                <a:cs typeface="Be Vietnam Pro" pitchFamily="34" charset="-120"/>
+              </a:rPr>
+              <a:t> đôi:</a:t>
+            </a:r>
+            <a:r>
+              <a:rPr lang="en-US" sz="2850" dirty="0" spc="-1" kern="0">
+                <a:solidFill>
+                  <a:srgbClr val="14161C"/>
+                </a:solidFill>
+                <a:latin typeface="Be Vietnam Pro" pitchFamily="34" charset="0"/>
+                <a:ea typeface="Be Vietnam Pro" pitchFamily="34" charset="-122"/>
+                <a:cs typeface="Be Vietnam Pro" pitchFamily="34" charset="-120"/>
+              </a:rPr>
+              <a:t> thêm</a:t>
+            </a:r>
+            <a:r>
+              <a:rPr lang="en-US" sz="2850" dirty="0" spc="-3" kern="0">
+                <a:solidFill>
+                  <a:srgbClr val="14161C"/>
+                </a:solidFill>
+                <a:latin typeface="Be Vietnam Pro" pitchFamily="34" charset="0"/>
+                <a:ea typeface="Be Vietnam Pro" pitchFamily="34" charset="-122"/>
+                <a:cs typeface="Be Vietnam Pro" pitchFamily="34" charset="-120"/>
+              </a:rPr>
+              <a:t> khóa</a:t>
+            </a:r>
+            <a:r>
               <a:rPr lang="en-US" sz="2850" dirty="0" spc="-2" kern="0">
                 <a:solidFill>
                   <a:srgbClr val="14161C"/>
@@ -11765,10 +11875,10 @@
                 <a:ea typeface="Be Vietnam Pro" pitchFamily="34" charset="-122"/>
                 <a:cs typeface="Be Vietnam Pro" pitchFamily="34" charset="-120"/>
               </a:rPr>
-              <a:t>Ghi</a:t>
-            </a:r>
-            <a:r>
-              <a:rPr lang="en-US" sz="2850" dirty="0" spc="0" kern="0">
+              <a:t> chống</a:t>
+            </a:r>
+            <a:r>
+              <a:rPr lang="en-US" sz="2850" dirty="0" spc="-1" kern="0">
                 <a:solidFill>
                   <a:srgbClr val="14161C"/>
                 </a:solidFill>
@@ -11776,73 +11886,7 @@
                 <a:ea typeface="Be Vietnam Pro" pitchFamily="34" charset="-122"/>
                 <a:cs typeface="Be Vietnam Pro" pitchFamily="34" charset="-120"/>
               </a:rPr>
-              <a:t> tiền</a:t>
-            </a:r>
-            <a:r>
-              <a:rPr lang="en-US" sz="2850" dirty="0" spc="-24" kern="0">
-                <a:solidFill>
-                  <a:srgbClr val="14161C"/>
-                </a:solidFill>
-                <a:latin typeface="Be Vietnam Pro" pitchFamily="34" charset="0"/>
-                <a:ea typeface="Be Vietnam Pro" pitchFamily="34" charset="-122"/>
-                <a:cs typeface="Be Vietnam Pro" pitchFamily="34" charset="-120"/>
-              </a:rPr>
-              <a:t> trọn</a:t>
-            </a:r>
-            <a:r>
-              <a:rPr lang="en-US" sz="2850" dirty="0" spc="-10" kern="0">
-                <a:solidFill>
-                  <a:srgbClr val="14161C"/>
-                </a:solidFill>
-                <a:latin typeface="Be Vietnam Pro" pitchFamily="34" charset="0"/>
-                <a:ea typeface="Be Vietnam Pro" pitchFamily="34" charset="-122"/>
-                <a:cs typeface="Be Vietnam Pro" pitchFamily="34" charset="-120"/>
-              </a:rPr>
-              <a:t> vẹn,</a:t>
-            </a:r>
-            <a:r>
-              <a:rPr lang="en-US" sz="2850" dirty="0" spc="-2" kern="0">
-                <a:solidFill>
-                  <a:srgbClr val="14161C"/>
-                </a:solidFill>
-                <a:latin typeface="Be Vietnam Pro" pitchFamily="34" charset="0"/>
-                <a:ea typeface="Be Vietnam Pro" pitchFamily="34" charset="-122"/>
-                <a:cs typeface="Be Vietnam Pro" pitchFamily="34" charset="-120"/>
-              </a:rPr>
-              <a:t> hoặc</a:t>
-            </a:r>
-            <a:r>
-              <a:rPr lang="en-US" sz="2850" dirty="0" spc="-3" kern="0">
-                <a:solidFill>
-                  <a:srgbClr val="14161C"/>
-                </a:solidFill>
-                <a:latin typeface="Be Vietnam Pro" pitchFamily="34" charset="0"/>
-                <a:ea typeface="Be Vietnam Pro" pitchFamily="34" charset="-122"/>
-                <a:cs typeface="Be Vietnam Pro" pitchFamily="34" charset="-120"/>
-              </a:rPr>
-              <a:t> không</a:t>
-            </a:r>
-            <a:r>
-              <a:rPr lang="en-US" sz="2850" dirty="0" spc="-30" kern="0">
-                <a:solidFill>
-                  <a:srgbClr val="14161C"/>
-                </a:solidFill>
-                <a:latin typeface="Be Vietnam Pro" pitchFamily="34" charset="0"/>
-                <a:ea typeface="Be Vietnam Pro" pitchFamily="34" charset="-122"/>
-                <a:cs typeface="Be Vietnam Pro" pitchFamily="34" charset="-120"/>
-              </a:rPr>
-              <a:t> xảy</a:t>
-            </a:r>
-            <a:r>
-              <a:rPr lang="en-US" sz="2850" dirty="0" spc="-24" kern="0">
-                <a:solidFill>
-                  <a:srgbClr val="14161C"/>
-                </a:solidFill>
-                <a:latin typeface="Be Vietnam Pro" pitchFamily="34" charset="0"/>
-                <a:ea typeface="Be Vietnam Pro" pitchFamily="34" charset="-122"/>
-                <a:cs typeface="Be Vietnam Pro" pitchFamily="34" charset="-120"/>
-              </a:rPr>
-              <a:t> ra.</a:t>
+              <a:t> trùng.</a:t>
             </a:r>
             <a:endParaRPr lang="en-US" sz="2850" dirty="0"/>
           </a:p>
@@ -12687,7 +12731,7 @@
               <a:t>Ghi</a:t>
             </a:r>
             <a:r>
-              <a:rPr lang="en-US" sz="2550" dirty="0" spc="-10" kern="0">
+              <a:rPr lang="en-US" sz="2550" dirty="0" spc="1" kern="0">
                 <a:solidFill>
                   <a:srgbClr val="E4E1D8"/>
                 </a:solidFill>
@@ -12695,7 +12739,29 @@
                 <a:ea typeface="Be Vietnam Pro" pitchFamily="34" charset="-122"/>
                 <a:cs typeface="Be Vietnam Pro" pitchFamily="34" charset="-120"/>
               </a:rPr>
-              <a:t> số</a:t>
+              <a:t> tiền</a:t>
+            </a:r>
+            <a:r>
+              <a:rPr lang="en-US" sz="2550" dirty="0" spc="-21" kern="0">
+                <a:solidFill>
+                  <a:srgbClr val="E4E1D8"/>
+                </a:solidFill>
+                <a:latin typeface="Be Vietnam Pro" pitchFamily="34" charset="0"/>
+                <a:ea typeface="Be Vietnam Pro" pitchFamily="34" charset="-122"/>
+                <a:cs typeface="Be Vietnam Pro" pitchFamily="34" charset="-120"/>
+              </a:rPr>
+              <a:t> trọn</a:t>
+            </a:r>
+            <a:r>
+              <a:rPr lang="en-US" sz="2550" dirty="0" spc="-11" kern="0">
+                <a:solidFill>
+                  <a:srgbClr val="E4E1D8"/>
+                </a:solidFill>
+                <a:latin typeface="Be Vietnam Pro" pitchFamily="34" charset="0"/>
+                <a:ea typeface="Be Vietnam Pro" pitchFamily="34" charset="-122"/>
+                <a:cs typeface="Be Vietnam Pro" pitchFamily="34" charset="-120"/>
+              </a:rPr>
+              <a:t> vẹn;</a:t>
             </a:r>
             <a:r>
               <a:rPr lang="en-US" sz="2550" dirty="0" spc="0" kern="0">
@@ -12706,10 +12772,10 @@
                 <a:ea typeface="Be Vietnam Pro" pitchFamily="34" charset="-122"/>
                 <a:cs typeface="Be Vietnam Pro" pitchFamily="34" charset="-120"/>
               </a:rPr>
-              <a:t> tiền</a:t>
-            </a:r>
-            <a:r>
-              <a:rPr lang="en-US" sz="2550" dirty="0" spc="-9" kern="0">
+              <a:t> chống</a:t>
+            </a:r>
+            <a:r>
+              <a:rPr lang="en-US" sz="2550" dirty="0" spc="-1" kern="0">
                 <a:solidFill>
                   <a:srgbClr val="E4E1D8"/>
                 </a:solidFill>
@@ -12717,7 +12783,18 @@
                 <a:ea typeface="Be Vietnam Pro" pitchFamily="34" charset="-122"/>
                 <a:cs typeface="Be Vietnam Pro" pitchFamily="34" charset="-120"/>
               </a:rPr>
-              <a:t> này</a:t>
+              <a:t> trùng</a:t>
+            </a:r>
+            <a:r>
+              <a:rPr lang="en-US" sz="2550" dirty="0" spc="1" kern="0">
+                <a:solidFill>
+                  <a:srgbClr val="E4E1D8"/>
+                </a:solidFill>
+                <a:latin typeface="Be Vietnam Pro" pitchFamily="34" charset="0"/>
+                <a:ea typeface="Be Vietnam Pro" pitchFamily="34" charset="-122"/>
+                <a:cs typeface="Be Vietnam Pro" pitchFamily="34" charset="-120"/>
+              </a:rPr>
+              <a:t> cần thêm</a:t>
             </a:r>
             <a:r>
               <a:rPr lang="en-US" sz="2550" dirty="0" spc="-1" kern="0">
@@ -12728,29 +12805,7 @@
                 <a:ea typeface="Be Vietnam Pro" pitchFamily="34" charset="-122"/>
                 <a:cs typeface="Be Vietnam Pro" pitchFamily="34" charset="-120"/>
               </a:rPr>
-              <a:t> cho đúng,</a:t>
-            </a:r>
-            <a:r>
-              <a:rPr lang="en-US" sz="2550" dirty="0" spc="-5" kern="0">
-                <a:solidFill>
-                  <a:srgbClr val="E4E1D8"/>
-                </a:solidFill>
-                <a:latin typeface="Be Vietnam Pro" pitchFamily="34" charset="0"/>
-                <a:ea typeface="Be Vietnam Pro" pitchFamily="34" charset="-122"/>
-                <a:cs typeface="Be Vietnam Pro" pitchFamily="34" charset="-120"/>
-              </a:rPr>
-              <a:t> một</a:t>
-            </a:r>
-            <a:r>
-              <a:rPr lang="en-US" sz="2550" dirty="0" spc="1" kern="0">
-                <a:solidFill>
-                  <a:srgbClr val="E4E1D8"/>
-                </a:solidFill>
-                <a:latin typeface="Be Vietnam Pro" pitchFamily="34" charset="0"/>
-                <a:ea typeface="Be Vietnam Pro" pitchFamily="34" charset="-122"/>
-                <a:cs typeface="Be Vietnam Pro" pitchFamily="34" charset="-120"/>
-              </a:rPr>
-              <a:t> lần.</a:t>
+              <a:t> khóa.</a:t>
             </a:r>
             <a:endParaRPr lang="en-US" sz="2550" dirty="0"/>
           </a:p>
